--- a/docs/pptx/entire/ritu-entire-scatter-cg-epi-bmi25.pptx
+++ b/docs/pptx/entire/ritu-entire-scatter-cg-epi-bmi25.pptx
@@ -4760,7 +4760,7 @@
           </p:nvSpPr>
           <p:spPr>
             <a:xfrm>
-              <a:off x="3757867" y="4242157"/>
+              <a:off x="3757871" y="4242156"/>
               <a:ext cx="52362" cy="52362"/>
             </a:xfrm>
             <a:prstGeom prst="ellipse">
@@ -29820,7 +29820,7 @@
           </p:nvSpPr>
           <p:spPr>
             <a:xfrm>
-              <a:off x="7109168" y="3226038"/>
+              <a:off x="7109161" y="3226039"/>
               <a:ext cx="52362" cy="52362"/>
             </a:xfrm>
             <a:prstGeom prst="ellipse">
@@ -37791,12 +37791,12 @@
           <p:spPr>
             <a:xfrm>
               <a:off x="2338367" y="2981797"/>
-              <a:ext cx="6278843" cy="1724681"/>
+              <a:ext cx="6278843" cy="1724682"/>
             </a:xfrm>
             <a:custGeom>
               <a:avLst/>
               <a:pathLst>
-                <a:path w="6278843" h="1724681">
+                <a:path w="6278843" h="1724682">
                   <a:moveTo>
                     <a:pt x="6278843" y="0"/>
                   </a:moveTo>
@@ -37918,7 +37918,7 @@
                     <a:pt x="158461" y="1678194"/>
                   </a:lnTo>
                   <a:lnTo>
-                    <a:pt x="0" y="1724681"/>
+                    <a:pt x="0" y="1724682"/>
                   </a:lnTo>
                 </a:path>
               </a:pathLst>
